--- a/docs/video-scripts/slides/pptx/module-5/module-5-intro.pptx
+++ b/docs/video-scripts/slides/pptx/module-5/module-5-intro.pptx
@@ -3169,7 +3169,7 @@
               </a:lnSpc>
             </a:pPr>
             <a:r>
-              <a:rPr sz="1400" b="1">
+              <a:rPr sz="1400" b="1" i="0">
                 <a:solidFill>
                   <a:srgbClr val="2B6E2B"/>
                 </a:solidFill>
@@ -3208,7 +3208,7 @@
               </a:lnSpc>
             </a:pPr>
             <a:r>
-              <a:rPr sz="5400" b="1">
+              <a:rPr sz="5400" b="1" i="0">
                 <a:solidFill>
                   <a:srgbClr val="030303"/>
                 </a:solidFill>
@@ -3247,7 +3247,7 @@
               </a:lnSpc>
             </a:pPr>
             <a:r>
-              <a:rPr sz="2200" b="0">
+              <a:rPr sz="2200" b="0" i="0">
                 <a:solidFill>
                   <a:srgbClr val="272525"/>
                 </a:solidFill>
@@ -3286,7 +3286,7 @@
               </a:lnSpc>
             </a:pPr>
             <a:r>
-              <a:rPr sz="1100" b="1">
+              <a:rPr sz="1100" b="1" i="0">
                 <a:solidFill>
                   <a:srgbClr val="2B6E2B"/>
                 </a:solidFill>
@@ -3351,7 +3351,7 @@
               </a:lnSpc>
             </a:pPr>
             <a:r>
-              <a:rPr sz="1200" b="1">
+              <a:rPr sz="1200" b="1" i="0">
                 <a:solidFill>
                   <a:srgbClr val="2B6E2B"/>
                 </a:solidFill>
@@ -3390,7 +3390,7 @@
               </a:lnSpc>
             </a:pPr>
             <a:r>
-              <a:rPr sz="4200" b="1">
+              <a:rPr sz="4200" b="1" i="0">
                 <a:solidFill>
                   <a:srgbClr val="030303"/>
                 </a:solidFill>
@@ -3473,7 +3473,7 @@
               </a:lnSpc>
             </a:pPr>
             <a:r>
-              <a:rPr sz="2200" b="0">
+              <a:rPr sz="2200" b="0" i="0">
                 <a:solidFill>
                   <a:srgbClr val="272525"/>
                 </a:solidFill>
@@ -3489,7 +3489,7 @@
               </a:lnSpc>
             </a:pPr>
             <a:r>
-              <a:rPr sz="2200" b="0">
+              <a:rPr sz="2200" b="0" i="0">
                 <a:solidFill>
                   <a:srgbClr val="272525"/>
                 </a:solidFill>
@@ -3505,7 +3505,7 @@
               </a:lnSpc>
             </a:pPr>
             <a:r>
-              <a:rPr sz="2200" b="0">
+              <a:rPr sz="2200" b="0" i="0">
                 <a:solidFill>
                   <a:srgbClr val="272525"/>
                 </a:solidFill>
